--- a/classes/parte-5-explotacion-de-sistemas-y-binarios/128-integer-overflows-y-errores-aritmeticos/clase-128-presentacion.pptx
+++ b/classes/parte-5-explotacion-de-sistemas-y-binarios/128-integer-overflows-y-errores-aritmeticos/clase-128-presentacion.pptx
@@ -17,6 +17,8 @@
     <p:sldId id="265" r:id="rId16"/>
     <p:sldId id="266" r:id="rId17"/>
     <p:sldId id="267" r:id="rId18"/>
+    <p:sldId id="268" r:id="rId19"/>
+    <p:sldId id="269" r:id="rId20"/>
   </p:sldIdLst>
   <p:sldSz cx="9144000" cy="6858000" type="screen4x3"/>
   <p:notesSz cx="6858000" cy="9144000"/>
@@ -3198,7 +3200,7 @@
                   <a:srgbClr val="0B3D2E"/>
                 </a:solidFill>
               </a:rPr>
-              <a:t>⚠️ Errores comunes</a:t>
+              <a:t>📝 Reto verificable</a:t>
             </a:r>
           </a:p>
         </p:txBody>
@@ -3236,67 +3238,52 @@
                   <a:srgbClr val="22282E"/>
                 </a:solidFill>
               </a:rPr>
-              <a:t>•  No se desborda en 64 bits — El overflow depende del ancho del tipo; prueba en 32 bits o tipos pequeños</a:t>
-            </a:r>
-          </a:p>
-          <a:p>
-            <a:pPr>
-              <a:spcAft>
-                <a:spcPts val="600"/>
-              </a:spcAft>
-            </a:pPr>
-            <a:r>
-              <a:rPr sz="1500">
-                <a:solidFill>
-                  <a:srgbClr val="22282E"/>
-                </a:solidFill>
-              </a:rPr>
-              <a:t>•  Chequeo if (a+b &lt; a) optimizado — UB en signed; usa unsigned o builtinoverflow</a:t>
-            </a:r>
-          </a:p>
-          <a:p>
-            <a:pPr>
-              <a:spcAft>
-                <a:spcPts val="600"/>
-              </a:spcAft>
-            </a:pPr>
-            <a:r>
-              <a:rPr sz="1500">
-                <a:solidFill>
-                  <a:srgbClr val="22282E"/>
-                </a:solidFill>
-              </a:rPr>
-              <a:t>•  UBSan no reporta — No compilaste con -fsanitize=undefined</a:t>
-            </a:r>
-          </a:p>
-          <a:p>
-            <a:pPr>
-              <a:spcAft>
-                <a:spcPts val="600"/>
-              </a:spcAft>
-            </a:pPr>
-            <a:r>
-              <a:rPr sz="1500">
-                <a:solidFill>
-                  <a:srgbClr val="22282E"/>
-                </a:solidFill>
-              </a:rPr>
-              <a:t>•  Valor negativo "pasa" el límite — Comparación signed; convierte a unsigned con cuidado</a:t>
-            </a:r>
-          </a:p>
-          <a:p>
-            <a:pPr>
-              <a:spcAft>
-                <a:spcPts val="600"/>
-              </a:spcAft>
-            </a:pPr>
-            <a:r>
-              <a:rPr sz="1500">
-                <a:solidFill>
-                  <a:srgbClr val="22282E"/>
-                </a:solidFill>
-              </a:rPr>
-              <a:t>•  memcpy tamaño enorme — Underflow en el cálculo; valida antes</a:t>
+              <a:t>•  Toma intov.c, demuestra el heap overflow con ASan y luego repáralo con builtinmuloverflow,</a:t>
+            </a:r>
+          </a:p>
+          <a:p>
+            <a:pPr>
+              <a:spcAft>
+                <a:spcPts val="600"/>
+              </a:spcAft>
+            </a:pPr>
+            <a:r>
+              <a:rPr sz="1500">
+                <a:solidFill>
+                  <a:srgbClr val="22282E"/>
+                </a:solidFill>
+              </a:rPr>
+              <a:t>•  probando que el mismo n malicioso ya no corrompe memoria.</a:t>
+            </a:r>
+          </a:p>
+          <a:p>
+            <a:pPr>
+              <a:spcAft>
+                <a:spcPts val="600"/>
+              </a:spcAft>
+            </a:pPr>
+            <a:r>
+              <a:rPr sz="1500">
+                <a:solidFill>
+                  <a:srgbClr val="22282E"/>
+                </a:solidFill>
+              </a:rPr>
+              <a:t>•  Criterio de aceptación: antes del fix ASan reporta heap-buffer-overflow; después, el programa</a:t>
+            </a:r>
+          </a:p>
+          <a:p>
+            <a:pPr>
+              <a:spcAft>
+                <a:spcPts val="600"/>
+              </a:spcAft>
+            </a:pPr>
+            <a:r>
+              <a:rPr sz="1500">
+                <a:solidFill>
+                  <a:srgbClr val="22282E"/>
+                </a:solidFill>
+              </a:rPr>
+              <a:t>•  rechaza el tamaño y ASan no reporta nada.</a:t>
             </a:r>
           </a:p>
         </p:txBody>
@@ -3347,7 +3334,7 @@
                   <a:srgbClr val="0B3D2E"/>
                 </a:solidFill>
               </a:rPr>
-              <a:t>❓ Preguntas frecuentes</a:t>
+              <a:t>⚠️ Errores comunes</a:t>
             </a:r>
           </a:p>
         </p:txBody>
@@ -3385,82 +3372,67 @@
                   <a:srgbClr val="22282E"/>
                 </a:solidFill>
               </a:rPr>
-              <a:t>•  ❓ ¿Un integer overflow es explotable por sí solo? Normalmente no: su peligro está en alimentar</a:t>
-            </a:r>
-          </a:p>
-          <a:p>
-            <a:pPr>
-              <a:spcAft>
-                <a:spcPts val="600"/>
-              </a:spcAft>
-            </a:pPr>
-            <a:r>
-              <a:rPr sz="1500">
-                <a:solidFill>
-                  <a:srgbClr val="22282E"/>
-                </a:solidFill>
-              </a:rPr>
-              <a:t>•  después un malloc/memcpy/índice.</a:t>
-            </a:r>
-          </a:p>
-          <a:p>
-            <a:pPr>
-              <a:spcAft>
-                <a:spcPts val="600"/>
-              </a:spcAft>
-            </a:pPr>
-            <a:r>
-              <a:rPr sz="1500">
-                <a:solidFill>
-                  <a:srgbClr val="22282E"/>
-                </a:solidFill>
-              </a:rPr>
-              <a:t>•  ❓ ¿signed overflow es UB? Sí en C: el compilador puede asumir que no ocurre, generando bugs</a:t>
-            </a:r>
-          </a:p>
-          <a:p>
-            <a:pPr>
-              <a:spcAft>
-                <a:spcPts val="600"/>
-              </a:spcAft>
-            </a:pPr>
-            <a:r>
-              <a:rPr sz="1500">
-                <a:solidFill>
-                  <a:srgbClr val="22282E"/>
-                </a:solidFill>
-              </a:rPr>
-              <a:t>•  sutiles. Unsigned hace wrap definido.</a:t>
-            </a:r>
-          </a:p>
-          <a:p>
-            <a:pPr>
-              <a:spcAft>
-                <a:spcPts val="600"/>
-              </a:spcAft>
-            </a:pPr>
-            <a:r>
-              <a:rPr sz="1500">
-                <a:solidFill>
-                  <a:srgbClr val="22282E"/>
-                </a:solidFill>
-              </a:rPr>
-              <a:t>•  ❓ ¿Cómo protejo mi código? Valida tamaños con builtins de overflow, usa sizet correctamente y</a:t>
-            </a:r>
-          </a:p>
-          <a:p>
-            <a:pPr>
-              <a:spcAft>
-                <a:spcPts val="600"/>
-              </a:spcAft>
-            </a:pPr>
-            <a:r>
-              <a:rPr sz="1500">
-                <a:solidFill>
-                  <a:srgbClr val="22282E"/>
-                </a:solidFill>
-              </a:rPr>
-              <a:t>•  activa UBSan en CI.</a:t>
+              <a:t>•  Esperabas que no se desbordara en 64 bits — n  8 se evalúa en unsigned int (32 bits) por las conversiones usuales, así que se desborda igual en un binario de 64 bits. Solo con operandos de 64 bits…</a:t>
+            </a:r>
+          </a:p>
+          <a:p>
+            <a:pPr>
+              <a:spcAft>
+                <a:spcPts val="600"/>
+              </a:spcAft>
+            </a:pPr>
+            <a:r>
+              <a:rPr sz="1500">
+                <a:solidFill>
+                  <a:srgbClr val="22282E"/>
+                </a:solidFill>
+              </a:rPr>
+              <a:t>•  Chequeo if (a+b &lt; a) optimizado — UB en signed; usa unsigned o builtinoverflow</a:t>
+            </a:r>
+          </a:p>
+          <a:p>
+            <a:pPr>
+              <a:spcAft>
+                <a:spcPts val="600"/>
+              </a:spcAft>
+            </a:pPr>
+            <a:r>
+              <a:rPr sz="1500">
+                <a:solidFill>
+                  <a:srgbClr val="22282E"/>
+                </a:solidFill>
+              </a:rPr>
+              <a:t>•  UBSan no reporta — No compilaste con -fsanitize=undefined</a:t>
+            </a:r>
+          </a:p>
+          <a:p>
+            <a:pPr>
+              <a:spcAft>
+                <a:spcPts val="600"/>
+              </a:spcAft>
+            </a:pPr>
+            <a:r>
+              <a:rPr sz="1500">
+                <a:solidFill>
+                  <a:srgbClr val="22282E"/>
+                </a:solidFill>
+              </a:rPr>
+              <a:t>•  Valor negativo "pasa" el límite — Comparación signed; convierte a unsigned con cuidado</a:t>
+            </a:r>
+          </a:p>
+          <a:p>
+            <a:pPr>
+              <a:spcAft>
+                <a:spcPts val="600"/>
+              </a:spcAft>
+            </a:pPr>
+            <a:r>
+              <a:rPr sz="1500">
+                <a:solidFill>
+                  <a:srgbClr val="22282E"/>
+                </a:solidFill>
+              </a:rPr>
+              <a:t>•  memcpy tamaño enorme — Underflow en el cálculo; valida antes</a:t>
             </a:r>
           </a:p>
         </p:txBody>
@@ -3511,7 +3483,7 @@
                   <a:srgbClr val="0B3D2E"/>
                 </a:solidFill>
               </a:rPr>
-              <a:t>🔗 Referencias</a:t>
+              <a:t>❓ Preguntas frecuentes</a:t>
             </a:r>
           </a:p>
         </p:txBody>
@@ -3549,6 +3521,170 @@
                   <a:srgbClr val="22282E"/>
                 </a:solidFill>
               </a:rPr>
+              <a:t>•  ❓ ¿Un integer overflow es explotable por sí solo? Normalmente no: su peligro está en alimentar</a:t>
+            </a:r>
+          </a:p>
+          <a:p>
+            <a:pPr>
+              <a:spcAft>
+                <a:spcPts val="600"/>
+              </a:spcAft>
+            </a:pPr>
+            <a:r>
+              <a:rPr sz="1500">
+                <a:solidFill>
+                  <a:srgbClr val="22282E"/>
+                </a:solidFill>
+              </a:rPr>
+              <a:t>•  después un malloc/memcpy/índice.</a:t>
+            </a:r>
+          </a:p>
+          <a:p>
+            <a:pPr>
+              <a:spcAft>
+                <a:spcPts val="600"/>
+              </a:spcAft>
+            </a:pPr>
+            <a:r>
+              <a:rPr sz="1500">
+                <a:solidFill>
+                  <a:srgbClr val="22282E"/>
+                </a:solidFill>
+              </a:rPr>
+              <a:t>•  ❓ ¿signed overflow es UB? Sí en C: el compilador puede asumir que no ocurre, generando bugs</a:t>
+            </a:r>
+          </a:p>
+          <a:p>
+            <a:pPr>
+              <a:spcAft>
+                <a:spcPts val="600"/>
+              </a:spcAft>
+            </a:pPr>
+            <a:r>
+              <a:rPr sz="1500">
+                <a:solidFill>
+                  <a:srgbClr val="22282E"/>
+                </a:solidFill>
+              </a:rPr>
+              <a:t>•  sutiles. Unsigned hace wrap definido.</a:t>
+            </a:r>
+          </a:p>
+          <a:p>
+            <a:pPr>
+              <a:spcAft>
+                <a:spcPts val="600"/>
+              </a:spcAft>
+            </a:pPr>
+            <a:r>
+              <a:rPr sz="1500">
+                <a:solidFill>
+                  <a:srgbClr val="22282E"/>
+                </a:solidFill>
+              </a:rPr>
+              <a:t>•  ❓ ¿Cómo protejo mi código? Valida tamaños con builtins de overflow, usa sizet correctamente y</a:t>
+            </a:r>
+          </a:p>
+          <a:p>
+            <a:pPr>
+              <a:spcAft>
+                <a:spcPts val="600"/>
+              </a:spcAft>
+            </a:pPr>
+            <a:r>
+              <a:rPr sz="1500">
+                <a:solidFill>
+                  <a:srgbClr val="22282E"/>
+                </a:solidFill>
+              </a:rPr>
+              <a:t>•  activa UBSan en CI.</a:t>
+            </a:r>
+          </a:p>
+        </p:txBody>
+      </p:sp>
+    </p:spTree>
+  </p:cSld>
+  <p:clrMapOvr>
+    <a:masterClrMapping/>
+  </p:clrMapOvr>
+</p:sld>
+</file>
+
+<file path=ppt/slides/slide13.xml><?xml version="1.0" encoding="utf-8"?>
+<p:sld xmlns:a="http://schemas.openxmlformats.org/drawingml/2006/main" xmlns:p="http://schemas.openxmlformats.org/presentationml/2006/main" xmlns:r="http://schemas.openxmlformats.org/officeDocument/2006/relationships">
+  <p:cSld>
+    <p:spTree>
+      <p:nvGrpSpPr>
+        <p:cNvPr id="1" name=""/>
+        <p:cNvGrpSpPr/>
+        <p:nvPr/>
+      </p:nvGrpSpPr>
+      <p:grpSpPr/>
+      <p:sp>
+        <p:nvSpPr>
+          <p:cNvPr id="2" name="TextBox 1"/>
+          <p:cNvSpPr txBox="1"/>
+          <p:nvPr/>
+        </p:nvSpPr>
+        <p:spPr>
+          <a:xfrm>
+            <a:off x="457200" y="320040"/>
+            <a:ext cx="8229600" cy="822960"/>
+          </a:xfrm>
+          <a:prstGeom prst="rect">
+            <a:avLst/>
+          </a:prstGeom>
+          <a:noFill/>
+        </p:spPr>
+        <p:txBody>
+          <a:bodyPr wrap="square">
+            <a:spAutoFit/>
+          </a:bodyPr>
+          <a:lstStyle/>
+          <a:p>
+            <a:r>
+              <a:rPr sz="2600" b="1">
+                <a:solidFill>
+                  <a:srgbClr val="0B3D2E"/>
+                </a:solidFill>
+              </a:rPr>
+              <a:t>🔗 Referencias</a:t>
+            </a:r>
+          </a:p>
+        </p:txBody>
+      </p:sp>
+      <p:sp>
+        <p:nvSpPr>
+          <p:cNvPr id="3" name="TextBox 2"/>
+          <p:cNvSpPr txBox="1"/>
+          <p:nvPr/>
+        </p:nvSpPr>
+        <p:spPr>
+          <a:xfrm>
+            <a:off x="457200" y="1280160"/>
+            <a:ext cx="8229600" cy="4937760"/>
+          </a:xfrm>
+          <a:prstGeom prst="rect">
+            <a:avLst/>
+          </a:prstGeom>
+          <a:noFill/>
+        </p:spPr>
+        <p:txBody>
+          <a:bodyPr wrap="square">
+            <a:spAutoFit/>
+          </a:bodyPr>
+          <a:lstStyle/>
+          <a:p>
+            <a:pPr>
+              <a:spcAft>
+                <a:spcPts val="600"/>
+              </a:spcAft>
+            </a:pPr>
+            <a:r>
+              <a:rPr sz="1500">
+                <a:solidFill>
+                  <a:srgbClr val="22282E"/>
+                </a:solidFill>
+              </a:rPr>
               <a:t>•  CWE-190: Integer Overflow or Wraparound — &lt;https://cwe.mitre.org/data/definitions/190.html&gt;</a:t>
             </a:r>
           </a:p>
@@ -3599,6 +3735,81 @@
           </a:p>
         </p:txBody>
       </p:sp>
+    </p:spTree>
+  </p:cSld>
+  <p:clrMapOvr>
+    <a:masterClrMapping/>
+  </p:clrMapOvr>
+</p:sld>
+</file>
+
+<file path=ppt/slides/slide14.xml><?xml version="1.0" encoding="utf-8"?>
+<p:sld xmlns:a="http://schemas.openxmlformats.org/drawingml/2006/main" xmlns:p="http://schemas.openxmlformats.org/presentationml/2006/main" xmlns:r="http://schemas.openxmlformats.org/officeDocument/2006/relationships">
+  <p:cSld>
+    <p:spTree>
+      <p:nvGrpSpPr>
+        <p:cNvPr id="1" name=""/>
+        <p:cNvGrpSpPr/>
+        <p:nvPr/>
+      </p:nvGrpSpPr>
+      <p:grpSpPr/>
+      <p:sp>
+        <p:nvSpPr>
+          <p:cNvPr id="2" name="TextBox 1"/>
+          <p:cNvSpPr txBox="1"/>
+          <p:nvPr/>
+        </p:nvSpPr>
+        <p:spPr>
+          <a:xfrm>
+            <a:off x="457200" y="274320"/>
+            <a:ext cx="8229600" cy="640080"/>
+          </a:xfrm>
+          <a:prstGeom prst="rect">
+            <a:avLst/>
+          </a:prstGeom>
+          <a:noFill/>
+        </p:spPr>
+        <p:txBody>
+          <a:bodyPr wrap="square">
+            <a:spAutoFit/>
+          </a:bodyPr>
+          <a:lstStyle/>
+          <a:p>
+            <a:r>
+              <a:rPr sz="2200" b="1">
+                <a:solidFill>
+                  <a:srgbClr val="0B3D2E"/>
+                </a:solidFill>
+              </a:rPr>
+              <a:t>Diagrama de la clase</a:t>
+            </a:r>
+          </a:p>
+        </p:txBody>
+      </p:sp>
+      <p:pic>
+        <p:nvPicPr>
+          <p:cNvPr id="3" name="Picture 2" descr="a0f1fe6a88df18d1.png"/>
+          <p:cNvPicPr>
+            <a:picLocks noChangeAspect="1"/>
+          </p:cNvPicPr>
+          <p:nvPr/>
+        </p:nvPicPr>
+        <p:blipFill>
+          <a:blip r:embed="rId2"/>
+          <a:stretch>
+            <a:fillRect/>
+          </a:stretch>
+        </p:blipFill>
+        <p:spPr>
+          <a:xfrm>
+            <a:off x="2911817" y="1097280"/>
+            <a:ext cx="3320366" cy="5303520"/>
+          </a:xfrm>
+          <a:prstGeom prst="rect">
+            <a:avLst/>
+          </a:prstGeom>
+        </p:spPr>
+      </p:pic>
     </p:spTree>
   </p:cSld>
   <p:clrMapOvr>
@@ -4122,7 +4333,7 @@
                   <a:srgbClr val="0B3D2E"/>
                 </a:solidFill>
               </a:rPr>
-              <a:t>📖 Definiciones y características</a:t>
+              <a:t>🧠 Explicación en profundidad</a:t>
             </a:r>
           </a:p>
         </p:txBody>
@@ -4160,97 +4371,97 @@
                   <a:srgbClr val="22282E"/>
                 </a:solidFill>
               </a:rPr>
-              <a:t>•  Integer overflow: el resultado excede el máximo del tipo y "da la vuelta". Clave: CWE-190;</a:t>
-            </a:r>
-          </a:p>
-          <a:p>
-            <a:pPr>
-              <a:spcAft>
-                <a:spcPts val="600"/>
-              </a:spcAft>
-            </a:pPr>
-            <a:r>
-              <a:rPr sz="1500">
-                <a:solidFill>
-                  <a:srgbClr val="22282E"/>
-                </a:solidFill>
-              </a:rPr>
-              <a:t>•  0xFFFFFFFF + 1 = 0 en uint32.</a:t>
-            </a:r>
-          </a:p>
-          <a:p>
-            <a:pPr>
-              <a:spcAft>
-                <a:spcPts val="600"/>
-              </a:spcAft>
-            </a:pPr>
-            <a:r>
-              <a:rPr sz="1500">
-                <a:solidFill>
-                  <a:srgbClr val="22282E"/>
-                </a:solidFill>
-              </a:rPr>
-              <a:t>•  Underflow: una resta cae por debajo de 0 en unsigned → número enorme. Clave: len - 1 con</a:t>
-            </a:r>
-          </a:p>
-          <a:p>
-            <a:pPr>
-              <a:spcAft>
-                <a:spcPts val="600"/>
-              </a:spcAft>
-            </a:pPr>
-            <a:r>
-              <a:rPr sz="1500">
-                <a:solidFill>
-                  <a:srgbClr val="22282E"/>
-                </a:solidFill>
-              </a:rPr>
-              <a:t>•  len=0 da SIZEMAX.</a:t>
-            </a:r>
-          </a:p>
-          <a:p>
-            <a:pPr>
-              <a:spcAft>
-                <a:spcPts val="600"/>
-              </a:spcAft>
-            </a:pPr>
-            <a:r>
-              <a:rPr sz="1500">
-                <a:solidFill>
-                  <a:srgbClr val="22282E"/>
-                </a:solidFill>
-              </a:rPr>
-              <a:t>•  Truncamiento: asignar un valor a un tipo más pequeño pierde bits altos. Clave: int→short</a:t>
-            </a:r>
-          </a:p>
-          <a:p>
-            <a:pPr>
-              <a:spcAft>
-                <a:spcPts val="600"/>
-              </a:spcAft>
-            </a:pPr>
-            <a:r>
-              <a:rPr sz="1500">
-                <a:solidFill>
-                  <a:srgbClr val="22282E"/>
-                </a:solidFill>
-              </a:rPr>
-              <a:t>•  puede pasar un tamaño grande a uno pequeño.</a:t>
-            </a:r>
-          </a:p>
-          <a:p>
-            <a:pPr>
-              <a:spcAft>
-                <a:spcPts val="600"/>
-              </a:spcAft>
-            </a:pPr>
-            <a:r>
-              <a:rPr sz="1500">
-                <a:solidFill>
-                  <a:srgbClr val="22282E"/>
-                </a:solidFill>
-              </a:rPr>
-              <a:t>•  Confusión signed/unsigned: una comparación firmada trata un negativo como válido. Clave:</a:t>
+              <a:t>•  Los errores aritméticos con enteros rara vez son explotables por sí solos: su gravedad está en</a:t>
+            </a:r>
+          </a:p>
+          <a:p>
+            <a:pPr>
+              <a:spcAft>
+                <a:spcPts val="600"/>
+              </a:spcAft>
+            </a:pPr>
+            <a:r>
+              <a:rPr sz="1500">
+                <a:solidFill>
+                  <a:srgbClr val="22282E"/>
+                </a:solidFill>
+              </a:rPr>
+              <a:t>•  que habilitan otras vulnerabilidades, típicamente un overflow de buffer o de heap. La causa es</a:t>
+            </a:r>
+          </a:p>
+          <a:p>
+            <a:pPr>
+              <a:spcAft>
+                <a:spcPts val="600"/>
+              </a:spcAft>
+            </a:pPr>
+            <a:r>
+              <a:rPr sz="1500">
+                <a:solidFill>
+                  <a:srgbClr val="22282E"/>
+                </a:solidFill>
+              </a:rPr>
+              <a:t>•  que los enteros de un ordenador tienen tamaño fijo y no pueden representar cualquier valor:</a:t>
+            </a:r>
+          </a:p>
+          <a:p>
+            <a:pPr>
+              <a:spcAft>
+                <a:spcPts val="600"/>
+              </a:spcAft>
+            </a:pPr>
+            <a:r>
+              <a:rPr sz="1500">
+                <a:solidFill>
+                  <a:srgbClr val="22282E"/>
+                </a:solidFill>
+              </a:rPr>
+              <a:t>•  un unsigned int de 32 bits solo llega hasta 4 294 967 295, y al sumarle uno da la vuelta</a:t>
+            </a:r>
+          </a:p>
+          <a:p>
+            <a:pPr>
+              <a:spcAft>
+                <a:spcPts val="600"/>
+              </a:spcAft>
+            </a:pPr>
+            <a:r>
+              <a:rPr sz="1500">
+                <a:solidFill>
+                  <a:srgbClr val="22282E"/>
+                </a:solidFill>
+              </a:rPr>
+              <a:t>•  (wrap-around) a 0. Ese comportamiento —perfectamente definido para los unsigned— produce</a:t>
+            </a:r>
+          </a:p>
+          <a:p>
+            <a:pPr>
+              <a:spcAft>
+                <a:spcPts val="600"/>
+              </a:spcAft>
+            </a:pPr>
+            <a:r>
+              <a:rPr sz="1500">
+                <a:solidFill>
+                  <a:srgbClr val="22282E"/>
+                </a:solidFill>
+              </a:rPr>
+              <a:t>•  resultados sorprendentes cuando el programador no lo anticipa, y esos resultados sorprendentes se</a:t>
+            </a:r>
+          </a:p>
+          <a:p>
+            <a:pPr>
+              <a:spcAft>
+                <a:spcPts val="600"/>
+              </a:spcAft>
+            </a:pPr>
+            <a:r>
+              <a:rPr sz="1500">
+                <a:solidFill>
+                  <a:srgbClr val="22282E"/>
+                </a:solidFill>
+              </a:rPr>
+              <a:t>•  convierten en fallos de memoria.</a:t>
             </a:r>
           </a:p>
         </p:txBody>
@@ -4301,7 +4512,7 @@
                   <a:srgbClr val="0B3D2E"/>
                 </a:solidFill>
               </a:rPr>
-              <a:t>🧰 Herramientas y preparación</a:t>
+              <a:t>📖 Definiciones y características</a:t>
             </a:r>
           </a:p>
         </p:txBody>
@@ -4339,22 +4550,97 @@
                   <a:srgbClr val="22282E"/>
                 </a:solidFill>
               </a:rPr>
-              <a:t>•  gcc -fsanitize=undefined -g intov.c -o intovubsan</a:t>
-            </a:r>
-          </a:p>
-          <a:p>
-            <a:pPr>
-              <a:spcAft>
-                <a:spcPts val="600"/>
-              </a:spcAft>
-            </a:pPr>
-            <a:r>
-              <a:rPr sz="1500">
-                <a:solidFill>
-                  <a:srgbClr val="22282E"/>
-                </a:solidFill>
-              </a:rPr>
-              <a:t>•  gcc -fsanitize=address -g intov.c -o intovasan</a:t>
+              <a:t>•  Integer overflow: el resultado excede el máximo del tipo y "da la vuelta". Clave: CWE-190;</a:t>
+            </a:r>
+          </a:p>
+          <a:p>
+            <a:pPr>
+              <a:spcAft>
+                <a:spcPts val="600"/>
+              </a:spcAft>
+            </a:pPr>
+            <a:r>
+              <a:rPr sz="1500">
+                <a:solidFill>
+                  <a:srgbClr val="22282E"/>
+                </a:solidFill>
+              </a:rPr>
+              <a:t>•  0xFFFFFFFF + 1 = 0 en uint32.</a:t>
+            </a:r>
+          </a:p>
+          <a:p>
+            <a:pPr>
+              <a:spcAft>
+                <a:spcPts val="600"/>
+              </a:spcAft>
+            </a:pPr>
+            <a:r>
+              <a:rPr sz="1500">
+                <a:solidFill>
+                  <a:srgbClr val="22282E"/>
+                </a:solidFill>
+              </a:rPr>
+              <a:t>•  Underflow: una resta cae por debajo de 0 en unsigned → número enorme. Clave: len - 1 con</a:t>
+            </a:r>
+          </a:p>
+          <a:p>
+            <a:pPr>
+              <a:spcAft>
+                <a:spcPts val="600"/>
+              </a:spcAft>
+            </a:pPr>
+            <a:r>
+              <a:rPr sz="1500">
+                <a:solidFill>
+                  <a:srgbClr val="22282E"/>
+                </a:solidFill>
+              </a:rPr>
+              <a:t>•  len=0 da SIZEMAX.</a:t>
+            </a:r>
+          </a:p>
+          <a:p>
+            <a:pPr>
+              <a:spcAft>
+                <a:spcPts val="600"/>
+              </a:spcAft>
+            </a:pPr>
+            <a:r>
+              <a:rPr sz="1500">
+                <a:solidFill>
+                  <a:srgbClr val="22282E"/>
+                </a:solidFill>
+              </a:rPr>
+              <a:t>•  Truncamiento: asignar un valor a un tipo más pequeño pierde bits altos. Clave: int→short</a:t>
+            </a:r>
+          </a:p>
+          <a:p>
+            <a:pPr>
+              <a:spcAft>
+                <a:spcPts val="600"/>
+              </a:spcAft>
+            </a:pPr>
+            <a:r>
+              <a:rPr sz="1500">
+                <a:solidFill>
+                  <a:srgbClr val="22282E"/>
+                </a:solidFill>
+              </a:rPr>
+              <a:t>•  puede pasar un tamaño grande a uno pequeño.</a:t>
+            </a:r>
+          </a:p>
+          <a:p>
+            <a:pPr>
+              <a:spcAft>
+                <a:spcPts val="600"/>
+              </a:spcAft>
+            </a:pPr>
+            <a:r>
+              <a:rPr sz="1500">
+                <a:solidFill>
+                  <a:srgbClr val="22282E"/>
+                </a:solidFill>
+              </a:rPr>
+              <a:t>•  Confusión signed/unsigned: una comparación firmada trata un negativo como válido. Clave:</a:t>
             </a:r>
           </a:p>
         </p:txBody>
@@ -4405,7 +4691,7 @@
                   <a:srgbClr val="0B3D2E"/>
                 </a:solidFill>
               </a:rPr>
-              <a:t>🧪 Laboratorio guiado</a:t>
+              <a:t>📔 Glosario</a:t>
             </a:r>
           </a:p>
         </p:txBody>
@@ -4443,97 +4729,97 @@
                   <a:srgbClr val="22282E"/>
                 </a:solidFill>
               </a:rPr>
-              <a:t>•  Cálculo de tamaño vulnerable intov.c:</a:t>
-            </a:r>
-          </a:p>
-          <a:p>
-            <a:pPr>
-              <a:spcAft>
-                <a:spcPts val="600"/>
-              </a:spcAft>
-            </a:pPr>
-            <a:r>
-              <a:rPr sz="1500">
-                <a:solidFill>
-                  <a:srgbClr val="22282E"/>
-                </a:solidFill>
-              </a:rPr>
-              <a:t>•  char dupitems(unsigned n){</a:t>
-            </a:r>
-          </a:p>
-          <a:p>
-            <a:pPr>
-              <a:spcAft>
-                <a:spcPts val="600"/>
-              </a:spcAft>
-            </a:pPr>
-            <a:r>
-              <a:rPr sz="1500">
-                <a:solidFill>
-                  <a:srgbClr val="22282E"/>
-                </a:solidFill>
-              </a:rPr>
-              <a:t>•  // BUG: n  8 puede desbordar en 32 bits -&gt; buffer minúsculo</a:t>
-            </a:r>
-          </a:p>
-          <a:p>
-            <a:pPr>
-              <a:spcAft>
-                <a:spcPts val="600"/>
-              </a:spcAft>
-            </a:pPr>
-            <a:r>
-              <a:rPr sz="1500">
-                <a:solidFill>
-                  <a:srgbClr val="22282E"/>
-                </a:solidFill>
-              </a:rPr>
-              <a:t>•  unsigned size = n  8;</a:t>
-            </a:r>
-          </a:p>
-          <a:p>
-            <a:pPr>
-              <a:spcAft>
-                <a:spcPts val="600"/>
-              </a:spcAft>
-            </a:pPr>
-            <a:r>
-              <a:rPr sz="1500">
-                <a:solidFill>
-                  <a:srgbClr val="22282E"/>
-                </a:solidFill>
-              </a:rPr>
-              <a:t>•  char buf = malloc(size);</a:t>
-            </a:r>
-          </a:p>
-          <a:p>
-            <a:pPr>
-              <a:spcAft>
-                <a:spcPts val="600"/>
-              </a:spcAft>
-            </a:pPr>
-            <a:r>
-              <a:rPr sz="1500">
-                <a:solidFill>
-                  <a:srgbClr val="22282E"/>
-                </a:solidFill>
-              </a:rPr>
-              <a:t>•  for (unsigned i = 0; i &lt; n; i++) memcpy(buf + i8, "AAAAAAAA", 8); // heap overflow</a:t>
-            </a:r>
-          </a:p>
-          <a:p>
-            <a:pPr>
-              <a:spcAft>
-                <a:spcPts val="600"/>
-              </a:spcAft>
-            </a:pPr>
-            <a:r>
-              <a:rPr sz="1500">
-                <a:solidFill>
-                  <a:srgbClr val="22282E"/>
-                </a:solidFill>
-              </a:rPr>
-              <a:t>•  return buf;</a:t>
+              <a:t>•  Término — Definición concisa</a:t>
+            </a:r>
+          </a:p>
+          <a:p>
+            <a:pPr>
+              <a:spcAft>
+                <a:spcPts val="600"/>
+              </a:spcAft>
+            </a:pPr>
+            <a:r>
+              <a:rPr sz="1500">
+                <a:solidFill>
+                  <a:srgbClr val="22282E"/>
+                </a:solidFill>
+              </a:rPr>
+              <a:t>•  Error aritmético — Bug de enteros que habilita otra vulnerabilidad</a:t>
+            </a:r>
+          </a:p>
+          <a:p>
+            <a:pPr>
+              <a:spcAft>
+                <a:spcPts val="600"/>
+              </a:spcAft>
+            </a:pPr>
+            <a:r>
+              <a:rPr sz="1500">
+                <a:solidFill>
+                  <a:srgbClr val="22282E"/>
+                </a:solidFill>
+              </a:rPr>
+              <a:t>•  Tamaño fijo — Los enteros no representan cualquier valor</a:t>
+            </a:r>
+          </a:p>
+          <a:p>
+            <a:pPr>
+              <a:spcAft>
+                <a:spcPts val="600"/>
+              </a:spcAft>
+            </a:pPr>
+            <a:r>
+              <a:rPr sz="1500">
+                <a:solidFill>
+                  <a:srgbClr val="22282E"/>
+                </a:solidFill>
+              </a:rPr>
+              <a:t>•  Wrap-around — El valor da la vuelta al superar el máximo del tipo</a:t>
+            </a:r>
+          </a:p>
+          <a:p>
+            <a:pPr>
+              <a:spcAft>
+                <a:spcPts val="600"/>
+              </a:spcAft>
+            </a:pPr>
+            <a:r>
+              <a:rPr sz="1500">
+                <a:solidFill>
+                  <a:srgbClr val="22282E"/>
+                </a:solidFill>
+              </a:rPr>
+              <a:t>•  Overflow de entero — Resultado que excede la capacidad del tipo</a:t>
+            </a:r>
+          </a:p>
+          <a:p>
+            <a:pPr>
+              <a:spcAft>
+                <a:spcPts val="600"/>
+              </a:spcAft>
+            </a:pPr>
+            <a:r>
+              <a:rPr sz="1500">
+                <a:solidFill>
+                  <a:srgbClr val="22282E"/>
+                </a:solidFill>
+              </a:rPr>
+              <a:t>•  Signed / unsigned — Interpretación del mismo patrón de bits</a:t>
+            </a:r>
+          </a:p>
+          <a:p>
+            <a:pPr>
+              <a:spcAft>
+                <a:spcPts val="600"/>
+              </a:spcAft>
+            </a:pPr>
+            <a:r>
+              <a:rPr sz="1500">
+                <a:solidFill>
+                  <a:srgbClr val="22282E"/>
+                </a:solidFill>
+              </a:rPr>
+              <a:t>•  Bypass con negativo — Un valor firmado negativo que se vuelve enorme sin signo</a:t>
             </a:r>
           </a:p>
         </p:txBody>
@@ -4584,7 +4870,7 @@
                   <a:srgbClr val="0B3D2E"/>
                 </a:solidFill>
               </a:rPr>
-              <a:t>✍️ Ejercicios</a:t>
+              <a:t>🧪 Laboratorio guiado</a:t>
             </a:r>
           </a:p>
         </p:txBody>
@@ -4622,82 +4908,97 @@
                   <a:srgbClr val="22282E"/>
                 </a:solidFill>
               </a:rPr>
-              <a:t>•  Muestra un ejemplo de underflow (len=0; len-1) y su valor resultante.</a:t>
-            </a:r>
-          </a:p>
-          <a:p>
-            <a:pPr>
-              <a:spcAft>
-                <a:spcPts val="600"/>
-              </a:spcAft>
-            </a:pPr>
-            <a:r>
-              <a:rPr sz="1500">
-                <a:solidFill>
-                  <a:srgbClr val="22282E"/>
-                </a:solidFill>
-              </a:rPr>
-              <a:t>•  Escribe un chequeo previo a malloc que rechace el overflow.</a:t>
-            </a:r>
-          </a:p>
-          <a:p>
-            <a:pPr>
-              <a:spcAft>
-                <a:spcPts val="600"/>
-              </a:spcAft>
-            </a:pPr>
-            <a:r>
-              <a:rPr sz="1500">
-                <a:solidFill>
-                  <a:srgbClr val="22282E"/>
-                </a:solidFill>
-              </a:rPr>
-              <a:t>•  Provoca un truncamiento int→short y explica la pérdida de bits.</a:t>
-            </a:r>
-          </a:p>
-          <a:p>
-            <a:pPr>
-              <a:spcAft>
-                <a:spcPts val="600"/>
-              </a:spcAft>
-            </a:pPr>
-            <a:r>
-              <a:rPr sz="1500">
-                <a:solidFill>
-                  <a:srgbClr val="22282E"/>
-                </a:solidFill>
-              </a:rPr>
-              <a:t>•  Detecta con UBSan un overflow signed y explica por qué es UB.</a:t>
-            </a:r>
-          </a:p>
-          <a:p>
-            <a:pPr>
-              <a:spcAft>
-                <a:spcPts val="600"/>
-              </a:spcAft>
-            </a:pPr>
-            <a:r>
-              <a:rPr sz="1500">
-                <a:solidFill>
-                  <a:srgbClr val="22282E"/>
-                </a:solidFill>
-              </a:rPr>
-              <a:t>•  Encuentra un off-by-one en un bucle for(i&lt;=n).</a:t>
-            </a:r>
-          </a:p>
-          <a:p>
-            <a:pPr>
-              <a:spcAft>
-                <a:spcPts val="600"/>
-              </a:spcAft>
-            </a:pPr>
-            <a:r>
-              <a:rPr sz="1500">
-                <a:solidFill>
-                  <a:srgbClr val="22282E"/>
-                </a:solidFill>
-              </a:rPr>
-              <a:t>•  Analiza un CVE real de integer overflow y resume la cadena hasta el heap overflow.</a:t>
+              <a:t>•  Cálculo de tamaño vulnerable intov.c:</a:t>
+            </a:r>
+          </a:p>
+          <a:p>
+            <a:pPr>
+              <a:spcAft>
+                <a:spcPts val="600"/>
+              </a:spcAft>
+            </a:pPr>
+            <a:r>
+              <a:rPr sz="1500">
+                <a:solidFill>
+                  <a:srgbClr val="22282E"/>
+                </a:solidFill>
+              </a:rPr>
+              <a:t>•  Ejecuta con un n que provoque wrap-around (n = 0x20000000 = 536870912) y observa el crash. El</a:t>
+            </a:r>
+          </a:p>
+          <a:p>
+            <a:pPr>
+              <a:spcAft>
+                <a:spcPts val="600"/>
+              </a:spcAft>
+            </a:pPr>
+            <a:r>
+              <a:rPr sz="1500">
+                <a:solidFill>
+                  <a:srgbClr val="22282E"/>
+                </a:solidFill>
+              </a:rPr>
+              <a:t>•  producto n  8 se evalúa en unsigned int (32 bits) por las conversiones aritméticas usuales, así</a:t>
+            </a:r>
+          </a:p>
+          <a:p>
+            <a:pPr>
+              <a:spcAft>
+                <a:spcPts val="600"/>
+              </a:spcAft>
+            </a:pPr>
+            <a:r>
+              <a:rPr sz="1500">
+                <a:solidFill>
+                  <a:srgbClr val="22282E"/>
+                </a:solidFill>
+              </a:rPr>
+              <a:t>•  que se desborda también en un binario nativo de 64 bits: no necesitas compilar a 32 bits.</a:t>
+            </a:r>
+          </a:p>
+          <a:p>
+            <a:pPr>
+              <a:spcAft>
+                <a:spcPts val="600"/>
+              </a:spcAft>
+            </a:pPr>
+            <a:r>
+              <a:rPr sz="1500">
+                <a:solidFill>
+                  <a:srgbClr val="22282E"/>
+                </a:solidFill>
+              </a:rPr>
+              <a:t>•  Confirma el diagnóstico. Ojo: el overflow unsigned es comportamiento definido</a:t>
+            </a:r>
+          </a:p>
+          <a:p>
+            <a:pPr>
+              <a:spcAft>
+                <a:spcPts val="600"/>
+              </a:spcAft>
+            </a:pPr>
+            <a:r>
+              <a:rPr sz="1500">
+                <a:solidFill>
+                  <a:srgbClr val="22282E"/>
+                </a:solidFill>
+              </a:rPr>
+              <a:t>•  (wrap-around), así que -fsanitize=undefined (UBSan) no lo reporta. Para verlo hace</a:t>
+            </a:r>
+          </a:p>
+          <a:p>
+            <a:pPr>
+              <a:spcAft>
+                <a:spcPts val="600"/>
+              </a:spcAft>
+            </a:pPr>
+            <a:r>
+              <a:rPr sz="1500">
+                <a:solidFill>
+                  <a:srgbClr val="22282E"/>
+                </a:solidFill>
+              </a:rPr>
+              <a:t>•  falta el sanitizer específico de clang:</a:t>
             </a:r>
           </a:p>
         </p:txBody>
@@ -4748,7 +5049,7 @@
                   <a:srgbClr val="0B3D2E"/>
                 </a:solidFill>
               </a:rPr>
-              <a:t>📝 Reto verificable</a:t>
+              <a:t>✍️ Ejercicios</a:t>
             </a:r>
           </a:p>
         </p:txBody>
@@ -4786,52 +5087,82 @@
                   <a:srgbClr val="22282E"/>
                 </a:solidFill>
               </a:rPr>
-              <a:t>•  Toma intov.c, demuestra el heap overflow con ASan y luego repáralo con builtinmuloverflow,</a:t>
-            </a:r>
-          </a:p>
-          <a:p>
-            <a:pPr>
-              <a:spcAft>
-                <a:spcPts val="600"/>
-              </a:spcAft>
-            </a:pPr>
-            <a:r>
-              <a:rPr sz="1500">
-                <a:solidFill>
-                  <a:srgbClr val="22282E"/>
-                </a:solidFill>
-              </a:rPr>
-              <a:t>•  probando que el mismo n malicioso ya no corrompe memoria.</a:t>
-            </a:r>
-          </a:p>
-          <a:p>
-            <a:pPr>
-              <a:spcAft>
-                <a:spcPts val="600"/>
-              </a:spcAft>
-            </a:pPr>
-            <a:r>
-              <a:rPr sz="1500">
-                <a:solidFill>
-                  <a:srgbClr val="22282E"/>
-                </a:solidFill>
-              </a:rPr>
-              <a:t>•  Criterio de aceptación: antes del fix ASan reporta heap-buffer-overflow; después, el programa</a:t>
-            </a:r>
-          </a:p>
-          <a:p>
-            <a:pPr>
-              <a:spcAft>
-                <a:spcPts val="600"/>
-              </a:spcAft>
-            </a:pPr>
-            <a:r>
-              <a:rPr sz="1500">
-                <a:solidFill>
-                  <a:srgbClr val="22282E"/>
-                </a:solidFill>
-              </a:rPr>
-              <a:t>•  rechaza el tamaño y ASan no reporta nada.</a:t>
+              <a:t>•  Muestra un ejemplo de underflow (len=0; len-1) y su valor resultante.</a:t>
+            </a:r>
+          </a:p>
+          <a:p>
+            <a:pPr>
+              <a:spcAft>
+                <a:spcPts val="600"/>
+              </a:spcAft>
+            </a:pPr>
+            <a:r>
+              <a:rPr sz="1500">
+                <a:solidFill>
+                  <a:srgbClr val="22282E"/>
+                </a:solidFill>
+              </a:rPr>
+              <a:t>•  Escribe un chequeo previo a malloc que rechace el overflow.</a:t>
+            </a:r>
+          </a:p>
+          <a:p>
+            <a:pPr>
+              <a:spcAft>
+                <a:spcPts val="600"/>
+              </a:spcAft>
+            </a:pPr>
+            <a:r>
+              <a:rPr sz="1500">
+                <a:solidFill>
+                  <a:srgbClr val="22282E"/>
+                </a:solidFill>
+              </a:rPr>
+              <a:t>•  Provoca un truncamiento int→short y explica la pérdida de bits.</a:t>
+            </a:r>
+          </a:p>
+          <a:p>
+            <a:pPr>
+              <a:spcAft>
+                <a:spcPts val="600"/>
+              </a:spcAft>
+            </a:pPr>
+            <a:r>
+              <a:rPr sz="1500">
+                <a:solidFill>
+                  <a:srgbClr val="22282E"/>
+                </a:solidFill>
+              </a:rPr>
+              <a:t>•  Detecta con UBSan un overflow signed y explica por qué es UB.</a:t>
+            </a:r>
+          </a:p>
+          <a:p>
+            <a:pPr>
+              <a:spcAft>
+                <a:spcPts val="600"/>
+              </a:spcAft>
+            </a:pPr>
+            <a:r>
+              <a:rPr sz="1500">
+                <a:solidFill>
+                  <a:srgbClr val="22282E"/>
+                </a:solidFill>
+              </a:rPr>
+              <a:t>•  Encuentra un off-by-one en un bucle for(i&lt;=n).</a:t>
+            </a:r>
+          </a:p>
+          <a:p>
+            <a:pPr>
+              <a:spcAft>
+                <a:spcPts val="600"/>
+              </a:spcAft>
+            </a:pPr>
+            <a:r>
+              <a:rPr sz="1500">
+                <a:solidFill>
+                  <a:srgbClr val="22282E"/>
+                </a:solidFill>
+              </a:rPr>
+              <a:t>•  Analiza un CVE real de integer overflow y resume la cadena hasta el heap overflow.</a:t>
             </a:r>
           </a:p>
         </p:txBody>
